--- a/20260827_LINEOA代理店向け資料ver2_2.pptx
+++ b/20260827_LINEOA代理店向け資料ver2_2.pptx
@@ -16673,7 +16673,7 @@
                 <a:ea typeface="メイリオ"/>
                 <a:cs typeface="メイリオ"/>
               </a:rPr>
-              <a:t>パターン3｜成果報酬型 ― 初期費用 ＋ 成果単価 × 獲得件数</a:t>
+              <a:t>パターン3｜成果報酬型 ― 初期費用 ＋ 成果単価 × 件数</a:t>
             </a:r>
           </a:p>
           <a:p>
